--- a/2026/2026-04-10-AI-Updates.pptx
+++ b/2026/2026-04-10-AI-Updates.pptx
@@ -987,7 +987,7 @@
   <p:cSld>
     <p:spTree>
       <p:nvGrpSpPr>
-        <p:cNvPr id="1" name="Shape 135"/>
+        <p:cNvPr id="1" name="Shape 136"/>
         <p:cNvGrpSpPr/>
         <p:nvPr/>
       </p:nvGrpSpPr>
@@ -1001,7 +1001,7 @@
       </p:grpSpPr>
       <p:sp>
         <p:nvSpPr>
-          <p:cNvPr id="136" name="Google Shape;136;g3d4b17a0f13_0_11:notes"/>
+          <p:cNvPr id="137" name="Google Shape;137;g3d4b17a0f13_0_11:notes"/>
           <p:cNvSpPr>
             <a:spLocks noGrp="1" noRot="1" noChangeAspect="1"/>
           </p:cNvSpPr>
@@ -1052,7 +1052,7 @@
       </p:sp>
       <p:sp>
         <p:nvSpPr>
-          <p:cNvPr id="137" name="Google Shape;137;g3d4b17a0f13_0_11:notes"/>
+          <p:cNvPr id="138" name="Google Shape;138;g3d4b17a0f13_0_11:notes"/>
           <p:cNvSpPr txBox="1">
             <a:spLocks noGrp="1"/>
           </p:cNvSpPr>
@@ -1109,7 +1109,7 @@
   <p:cSld>
     <p:spTree>
       <p:nvGrpSpPr>
-        <p:cNvPr id="1" name="Shape 143"/>
+        <p:cNvPr id="1" name="Shape 144"/>
         <p:cNvGrpSpPr/>
         <p:nvPr/>
       </p:nvGrpSpPr>
@@ -1123,7 +1123,7 @@
       </p:grpSpPr>
       <p:sp>
         <p:nvSpPr>
-          <p:cNvPr id="144" name="Google Shape;144;g396d94bc8f6_0_1:notes"/>
+          <p:cNvPr id="145" name="Google Shape;145;g396d94bc8f6_0_1:notes"/>
           <p:cNvSpPr>
             <a:spLocks noGrp="1" noRot="1" noChangeAspect="1"/>
           </p:cNvSpPr>
@@ -1174,7 +1174,7 @@
       </p:sp>
       <p:sp>
         <p:nvSpPr>
-          <p:cNvPr id="145" name="Google Shape;145;g396d94bc8f6_0_1:notes"/>
+          <p:cNvPr id="146" name="Google Shape;146;g396d94bc8f6_0_1:notes"/>
           <p:cNvSpPr txBox="1">
             <a:spLocks noGrp="1"/>
           </p:cNvSpPr>
@@ -1231,7 +1231,7 @@
   <p:cSld>
     <p:spTree>
       <p:nvGrpSpPr>
-        <p:cNvPr id="1" name="Shape 152"/>
+        <p:cNvPr id="1" name="Shape 153"/>
         <p:cNvGrpSpPr/>
         <p:nvPr/>
       </p:nvGrpSpPr>
@@ -1245,7 +1245,7 @@
       </p:grpSpPr>
       <p:sp>
         <p:nvSpPr>
-          <p:cNvPr id="153" name="Google Shape;153;g3d47a4b0b2a_0_0:notes"/>
+          <p:cNvPr id="154" name="Google Shape;154;g3d47a4b0b2a_0_0:notes"/>
           <p:cNvSpPr>
             <a:spLocks noGrp="1" noRot="1" noChangeAspect="1"/>
           </p:cNvSpPr>
@@ -1296,7 +1296,7 @@
       </p:sp>
       <p:sp>
         <p:nvSpPr>
-          <p:cNvPr id="154" name="Google Shape;154;g3d47a4b0b2a_0_0:notes"/>
+          <p:cNvPr id="155" name="Google Shape;155;g3d47a4b0b2a_0_0:notes"/>
           <p:cNvSpPr txBox="1">
             <a:spLocks noGrp="1"/>
           </p:cNvSpPr>
@@ -1353,7 +1353,7 @@
   <p:cSld>
     <p:spTree>
       <p:nvGrpSpPr>
-        <p:cNvPr id="1" name="Shape 159"/>
+        <p:cNvPr id="1" name="Shape 160"/>
         <p:cNvGrpSpPr/>
         <p:nvPr/>
       </p:nvGrpSpPr>
@@ -1367,7 +1367,7 @@
       </p:grpSpPr>
       <p:sp>
         <p:nvSpPr>
-          <p:cNvPr id="160" name="Google Shape;160;g3d4b17a0f13_0_0:notes"/>
+          <p:cNvPr id="161" name="Google Shape;161;g3d4b17a0f13_0_0:notes"/>
           <p:cNvSpPr>
             <a:spLocks noGrp="1" noRot="1" noChangeAspect="1"/>
           </p:cNvSpPr>
@@ -1418,7 +1418,7 @@
       </p:sp>
       <p:sp>
         <p:nvSpPr>
-          <p:cNvPr id="161" name="Google Shape;161;g3d4b17a0f13_0_0:notes"/>
+          <p:cNvPr id="162" name="Google Shape;162;g3d4b17a0f13_0_0:notes"/>
           <p:cNvSpPr txBox="1">
             <a:spLocks noGrp="1"/>
           </p:cNvSpPr>
@@ -1475,7 +1475,7 @@
   <p:cSld>
     <p:spTree>
       <p:nvGrpSpPr>
-        <p:cNvPr id="1" name="Shape 167"/>
+        <p:cNvPr id="1" name="Shape 168"/>
         <p:cNvGrpSpPr/>
         <p:nvPr/>
       </p:nvGrpSpPr>
@@ -1489,7 +1489,7 @@
       </p:grpSpPr>
       <p:sp>
         <p:nvSpPr>
-          <p:cNvPr id="168" name="Google Shape;168;g3d4b17a0f13_0_16:notes"/>
+          <p:cNvPr id="169" name="Google Shape;169;g3d4b17a0f13_0_16:notes"/>
           <p:cNvSpPr>
             <a:spLocks noGrp="1" noRot="1" noChangeAspect="1"/>
           </p:cNvSpPr>
@@ -1540,7 +1540,7 @@
       </p:sp>
       <p:sp>
         <p:nvSpPr>
-          <p:cNvPr id="169" name="Google Shape;169;g3d4b17a0f13_0_16:notes"/>
+          <p:cNvPr id="170" name="Google Shape;170;g3d4b17a0f13_0_16:notes"/>
           <p:cNvSpPr txBox="1">
             <a:spLocks noGrp="1"/>
           </p:cNvSpPr>
@@ -1597,7 +1597,7 @@
   <p:cSld>
     <p:spTree>
       <p:nvGrpSpPr>
-        <p:cNvPr id="1" name="Shape 178"/>
+        <p:cNvPr id="1" name="Shape 179"/>
         <p:cNvGrpSpPr/>
         <p:nvPr/>
       </p:nvGrpSpPr>
@@ -1611,7 +1611,7 @@
       </p:grpSpPr>
       <p:sp>
         <p:nvSpPr>
-          <p:cNvPr id="179" name="Google Shape;179;g3d4c0665f3e_0_0:notes"/>
+          <p:cNvPr id="180" name="Google Shape;180;g3d4c0665f3e_0_0:notes"/>
           <p:cNvSpPr>
             <a:spLocks noGrp="1" noRot="1" noChangeAspect="1"/>
           </p:cNvSpPr>
@@ -1662,7 +1662,7 @@
       </p:sp>
       <p:sp>
         <p:nvSpPr>
-          <p:cNvPr id="180" name="Google Shape;180;g3d4c0665f3e_0_0:notes"/>
+          <p:cNvPr id="181" name="Google Shape;181;g3d4c0665f3e_0_0:notes"/>
           <p:cNvSpPr txBox="1">
             <a:spLocks noGrp="1"/>
           </p:cNvSpPr>
@@ -1719,7 +1719,7 @@
   <p:cSld>
     <p:spTree>
       <p:nvGrpSpPr>
-        <p:cNvPr id="1" name="Shape 190"/>
+        <p:cNvPr id="1" name="Shape 191"/>
         <p:cNvGrpSpPr/>
         <p:nvPr/>
       </p:nvGrpSpPr>
@@ -1733,7 +1733,7 @@
       </p:grpSpPr>
       <p:sp>
         <p:nvSpPr>
-          <p:cNvPr id="191" name="Google Shape;191;g386e2e69489_1_1:notes"/>
+          <p:cNvPr id="192" name="Google Shape;192;g386e2e69489_1_1:notes"/>
           <p:cNvSpPr>
             <a:spLocks noGrp="1" noRot="1" noChangeAspect="1"/>
           </p:cNvSpPr>
@@ -1784,7 +1784,7 @@
       </p:sp>
       <p:sp>
         <p:nvSpPr>
-          <p:cNvPr id="192" name="Google Shape;192;g386e2e69489_1_1:notes"/>
+          <p:cNvPr id="193" name="Google Shape;193;g386e2e69489_1_1:notes"/>
           <p:cNvSpPr txBox="1">
             <a:spLocks noGrp="1"/>
           </p:cNvSpPr>
@@ -1841,7 +1841,7 @@
   <p:cSld>
     <p:spTree>
       <p:nvGrpSpPr>
-        <p:cNvPr id="1" name="Shape 199"/>
+        <p:cNvPr id="1" name="Shape 200"/>
         <p:cNvGrpSpPr/>
         <p:nvPr/>
       </p:nvGrpSpPr>
@@ -1855,7 +1855,7 @@
       </p:grpSpPr>
       <p:sp>
         <p:nvSpPr>
-          <p:cNvPr id="200" name="Google Shape;200;g3d4e8f0f52a_1_0:notes"/>
+          <p:cNvPr id="201" name="Google Shape;201;g3d4e8f0f52a_1_0:notes"/>
           <p:cNvSpPr>
             <a:spLocks noGrp="1" noRot="1" noChangeAspect="1"/>
           </p:cNvSpPr>
@@ -1906,7 +1906,7 @@
       </p:sp>
       <p:sp>
         <p:nvSpPr>
-          <p:cNvPr id="201" name="Google Shape;201;g3d4e8f0f52a_1_0:notes"/>
+          <p:cNvPr id="202" name="Google Shape;202;g3d4e8f0f52a_1_0:notes"/>
           <p:cNvSpPr txBox="1">
             <a:spLocks noGrp="1"/>
           </p:cNvSpPr>
@@ -1963,7 +1963,7 @@
   <p:cSld>
     <p:spTree>
       <p:nvGrpSpPr>
-        <p:cNvPr id="1" name="Shape 208"/>
+        <p:cNvPr id="1" name="Shape 209"/>
         <p:cNvGrpSpPr/>
         <p:nvPr/>
       </p:nvGrpSpPr>
@@ -1977,7 +1977,7 @@
       </p:grpSpPr>
       <p:sp>
         <p:nvSpPr>
-          <p:cNvPr id="209" name="Google Shape;209;g3d4c0665f3e_1_0:notes"/>
+          <p:cNvPr id="210" name="Google Shape;210;g3d4c0665f3e_1_0:notes"/>
           <p:cNvSpPr>
             <a:spLocks noGrp="1" noRot="1" noChangeAspect="1"/>
           </p:cNvSpPr>
@@ -2028,7 +2028,7 @@
       </p:sp>
       <p:sp>
         <p:nvSpPr>
-          <p:cNvPr id="210" name="Google Shape;210;g3d4c0665f3e_1_0:notes"/>
+          <p:cNvPr id="211" name="Google Shape;211;g3d4c0665f3e_1_0:notes"/>
           <p:cNvSpPr txBox="1">
             <a:spLocks noGrp="1"/>
           </p:cNvSpPr>
@@ -2085,7 +2085,7 @@
   <p:cSld>
     <p:spTree>
       <p:nvGrpSpPr>
-        <p:cNvPr id="1" name="Shape 218"/>
+        <p:cNvPr id="1" name="Shape 219"/>
         <p:cNvGrpSpPr/>
         <p:nvPr/>
       </p:nvGrpSpPr>
@@ -2099,7 +2099,7 @@
       </p:grpSpPr>
       <p:sp>
         <p:nvSpPr>
-          <p:cNvPr id="219" name="Google Shape;219;g386e2e69489_1_12:notes"/>
+          <p:cNvPr id="220" name="Google Shape;220;g386e2e69489_1_12:notes"/>
           <p:cNvSpPr>
             <a:spLocks noGrp="1" noRot="1" noChangeAspect="1"/>
           </p:cNvSpPr>
@@ -2150,7 +2150,7 @@
       </p:sp>
       <p:sp>
         <p:nvSpPr>
-          <p:cNvPr id="220" name="Google Shape;220;g386e2e69489_1_12:notes"/>
+          <p:cNvPr id="221" name="Google Shape;221;g386e2e69489_1_12:notes"/>
           <p:cNvSpPr txBox="1">
             <a:spLocks noGrp="1"/>
           </p:cNvSpPr>
@@ -2329,7 +2329,7 @@
   <p:cSld>
     <p:spTree>
       <p:nvGrpSpPr>
-        <p:cNvPr id="1" name="Shape 228"/>
+        <p:cNvPr id="1" name="Shape 229"/>
         <p:cNvGrpSpPr/>
         <p:nvPr/>
       </p:nvGrpSpPr>
@@ -2343,7 +2343,7 @@
       </p:grpSpPr>
       <p:sp>
         <p:nvSpPr>
-          <p:cNvPr id="229" name="Google Shape;229;g386f0cb46d0_0_1:notes"/>
+          <p:cNvPr id="230" name="Google Shape;230;g386f0cb46d0_0_1:notes"/>
           <p:cNvSpPr>
             <a:spLocks noGrp="1" noRot="1" noChangeAspect="1"/>
           </p:cNvSpPr>
@@ -2394,7 +2394,7 @@
       </p:sp>
       <p:sp>
         <p:nvSpPr>
-          <p:cNvPr id="230" name="Google Shape;230;g386f0cb46d0_0_1:notes"/>
+          <p:cNvPr id="231" name="Google Shape;231;g386f0cb46d0_0_1:notes"/>
           <p:cNvSpPr txBox="1">
             <a:spLocks noGrp="1"/>
           </p:cNvSpPr>
@@ -2451,7 +2451,7 @@
   <p:cSld>
     <p:spTree>
       <p:nvGrpSpPr>
-        <p:cNvPr id="1" name="Shape 235"/>
+        <p:cNvPr id="1" name="Shape 236"/>
         <p:cNvGrpSpPr/>
         <p:nvPr/>
       </p:nvGrpSpPr>
@@ -2465,7 +2465,7 @@
       </p:grpSpPr>
       <p:sp>
         <p:nvSpPr>
-          <p:cNvPr id="236" name="Google Shape;236;g396e8073bae_0_4:notes"/>
+          <p:cNvPr id="237" name="Google Shape;237;g396e8073bae_0_4:notes"/>
           <p:cNvSpPr>
             <a:spLocks noGrp="1" noRot="1" noChangeAspect="1"/>
           </p:cNvSpPr>
@@ -2516,7 +2516,7 @@
       </p:sp>
       <p:sp>
         <p:nvSpPr>
-          <p:cNvPr id="237" name="Google Shape;237;g396e8073bae_0_4:notes"/>
+          <p:cNvPr id="238" name="Google Shape;238;g396e8073bae_0_4:notes"/>
           <p:cNvSpPr txBox="1">
             <a:spLocks noGrp="1"/>
           </p:cNvSpPr>
@@ -2573,7 +2573,7 @@
   <p:cSld>
     <p:spTree>
       <p:nvGrpSpPr>
-        <p:cNvPr id="1" name="Shape 244"/>
+        <p:cNvPr id="1" name="Shape 245"/>
         <p:cNvGrpSpPr/>
         <p:nvPr/>
       </p:nvGrpSpPr>
@@ -2587,7 +2587,7 @@
       </p:grpSpPr>
       <p:sp>
         <p:nvSpPr>
-          <p:cNvPr id="245" name="Google Shape;245;g3d529580e8c_0_0:notes"/>
+          <p:cNvPr id="246" name="Google Shape;246;g3d529580e8c_0_0:notes"/>
           <p:cNvSpPr>
             <a:spLocks noGrp="1" noRot="1" noChangeAspect="1"/>
           </p:cNvSpPr>
@@ -2638,7 +2638,7 @@
       </p:sp>
       <p:sp>
         <p:nvSpPr>
-          <p:cNvPr id="246" name="Google Shape;246;g3d529580e8c_0_0:notes"/>
+          <p:cNvPr id="247" name="Google Shape;247;g3d529580e8c_0_0:notes"/>
           <p:cNvSpPr txBox="1">
             <a:spLocks noGrp="1"/>
           </p:cNvSpPr>
@@ -2695,7 +2695,7 @@
   <p:cSld>
     <p:spTree>
       <p:nvGrpSpPr>
-        <p:cNvPr id="1" name="Shape 254"/>
+        <p:cNvPr id="1" name="Shape 255"/>
         <p:cNvGrpSpPr/>
         <p:nvPr/>
       </p:nvGrpSpPr>
@@ -2709,7 +2709,7 @@
       </p:grpSpPr>
       <p:sp>
         <p:nvSpPr>
-          <p:cNvPr id="255" name="Google Shape;255;g3d4e9c75f3a_0_0:notes"/>
+          <p:cNvPr id="256" name="Google Shape;256;g3d4e9c75f3a_0_0:notes"/>
           <p:cNvSpPr>
             <a:spLocks noGrp="1" noRot="1" noChangeAspect="1"/>
           </p:cNvSpPr>
@@ -2760,7 +2760,7 @@
       </p:sp>
       <p:sp>
         <p:nvSpPr>
-          <p:cNvPr id="256" name="Google Shape;256;g3d4e9c75f3a_0_0:notes"/>
+          <p:cNvPr id="257" name="Google Shape;257;g3d4e9c75f3a_0_0:notes"/>
           <p:cNvSpPr txBox="1">
             <a:spLocks noGrp="1"/>
           </p:cNvSpPr>
@@ -2817,7 +2817,7 @@
   <p:cSld>
     <p:spTree>
       <p:nvGrpSpPr>
-        <p:cNvPr id="1" name="Shape 265"/>
+        <p:cNvPr id="1" name="Shape 266"/>
         <p:cNvGrpSpPr/>
         <p:nvPr/>
       </p:nvGrpSpPr>
@@ -2831,7 +2831,7 @@
       </p:grpSpPr>
       <p:sp>
         <p:nvSpPr>
-          <p:cNvPr id="266" name="Google Shape;266;g386e2e69489_1_25:notes"/>
+          <p:cNvPr id="267" name="Google Shape;267;g386e2e69489_1_25:notes"/>
           <p:cNvSpPr>
             <a:spLocks noGrp="1" noRot="1" noChangeAspect="1"/>
           </p:cNvSpPr>
@@ -2882,7 +2882,7 @@
       </p:sp>
       <p:sp>
         <p:nvSpPr>
-          <p:cNvPr id="267" name="Google Shape;267;g386e2e69489_1_25:notes"/>
+          <p:cNvPr id="268" name="Google Shape;268;g386e2e69489_1_25:notes"/>
           <p:cNvSpPr txBox="1">
             <a:spLocks noGrp="1"/>
           </p:cNvSpPr>
@@ -2939,7 +2939,7 @@
   <p:cSld>
     <p:spTree>
       <p:nvGrpSpPr>
-        <p:cNvPr id="1" name="Shape 276"/>
+        <p:cNvPr id="1" name="Shape 277"/>
         <p:cNvGrpSpPr/>
         <p:nvPr/>
       </p:nvGrpSpPr>
@@ -2953,7 +2953,7 @@
       </p:grpSpPr>
       <p:sp>
         <p:nvSpPr>
-          <p:cNvPr id="277" name="Google Shape;277;g397095be524_0_2:notes"/>
+          <p:cNvPr id="278" name="Google Shape;278;g397095be524_0_2:notes"/>
           <p:cNvSpPr>
             <a:spLocks noGrp="1" noRot="1" noChangeAspect="1"/>
           </p:cNvSpPr>
@@ -3004,7 +3004,7 @@
       </p:sp>
       <p:sp>
         <p:nvSpPr>
-          <p:cNvPr id="278" name="Google Shape;278;g397095be524_0_2:notes"/>
+          <p:cNvPr id="279" name="Google Shape;279;g397095be524_0_2:notes"/>
           <p:cNvSpPr txBox="1">
             <a:spLocks noGrp="1"/>
           </p:cNvSpPr>
@@ -3061,7 +3061,7 @@
   <p:cSld>
     <p:spTree>
       <p:nvGrpSpPr>
-        <p:cNvPr id="1" name="Shape 287"/>
+        <p:cNvPr id="1" name="Shape 288"/>
         <p:cNvGrpSpPr/>
         <p:nvPr/>
       </p:nvGrpSpPr>
@@ -3075,7 +3075,7 @@
       </p:grpSpPr>
       <p:sp>
         <p:nvSpPr>
-          <p:cNvPr id="288" name="Google Shape;288;p23:notes"/>
+          <p:cNvPr id="289" name="Google Shape;289;p23:notes"/>
           <p:cNvSpPr>
             <a:spLocks noGrp="1" noRot="1" noChangeAspect="1"/>
           </p:cNvSpPr>
@@ -3126,7 +3126,7 @@
       </p:sp>
       <p:sp>
         <p:nvSpPr>
-          <p:cNvPr id="289" name="Google Shape;289;p23:notes"/>
+          <p:cNvPr id="290" name="Google Shape;290;p23:notes"/>
           <p:cNvSpPr txBox="1">
             <a:spLocks noGrp="1"/>
           </p:cNvSpPr>
@@ -3183,7 +3183,7 @@
   <p:cSld>
     <p:spTree>
       <p:nvGrpSpPr>
-        <p:cNvPr id="1" name="Shape 297"/>
+        <p:cNvPr id="1" name="Shape 298"/>
         <p:cNvGrpSpPr/>
         <p:nvPr/>
       </p:nvGrpSpPr>
@@ -3197,7 +3197,7 @@
       </p:grpSpPr>
       <p:sp>
         <p:nvSpPr>
-          <p:cNvPr id="298" name="Google Shape;298;g3d45e9cc6ac_0_12:notes"/>
+          <p:cNvPr id="299" name="Google Shape;299;g3d45e9cc6ac_0_12:notes"/>
           <p:cNvSpPr>
             <a:spLocks noGrp="1" noRot="1" noChangeAspect="1"/>
           </p:cNvSpPr>
@@ -3238,7 +3238,7 @@
       </p:sp>
       <p:sp>
         <p:nvSpPr>
-          <p:cNvPr id="299" name="Google Shape;299;g3d45e9cc6ac_0_12:notes"/>
+          <p:cNvPr id="300" name="Google Shape;300;g3d45e9cc6ac_0_12:notes"/>
           <p:cNvSpPr txBox="1">
             <a:spLocks noGrp="1"/>
           </p:cNvSpPr>
@@ -3287,7 +3287,7 @@
   <p:cSld>
     <p:spTree>
       <p:nvGrpSpPr>
-        <p:cNvPr id="1" name="Shape 305"/>
+        <p:cNvPr id="1" name="Shape 306"/>
         <p:cNvGrpSpPr/>
         <p:nvPr/>
       </p:nvGrpSpPr>
@@ -3301,7 +3301,7 @@
       </p:grpSpPr>
       <p:sp>
         <p:nvSpPr>
-          <p:cNvPr id="306" name="Google Shape;306;p24:notes"/>
+          <p:cNvPr id="307" name="Google Shape;307;p24:notes"/>
           <p:cNvSpPr>
             <a:spLocks noGrp="1" noRot="1" noChangeAspect="1"/>
           </p:cNvSpPr>
@@ -3352,7 +3352,7 @@
       </p:sp>
       <p:sp>
         <p:nvSpPr>
-          <p:cNvPr id="307" name="Google Shape;307;p24:notes"/>
+          <p:cNvPr id="308" name="Google Shape;308;p24:notes"/>
           <p:cNvSpPr txBox="1">
             <a:spLocks noGrp="1"/>
           </p:cNvSpPr>
@@ -3409,7 +3409,7 @@
   <p:cSld>
     <p:spTree>
       <p:nvGrpSpPr>
-        <p:cNvPr id="1" name="Shape 315"/>
+        <p:cNvPr id="1" name="Shape 316"/>
         <p:cNvGrpSpPr/>
         <p:nvPr/>
       </p:nvGrpSpPr>
@@ -3423,7 +3423,7 @@
       </p:grpSpPr>
       <p:sp>
         <p:nvSpPr>
-          <p:cNvPr id="316" name="Google Shape;316;p25:notes"/>
+          <p:cNvPr id="317" name="Google Shape;317;p25:notes"/>
           <p:cNvSpPr>
             <a:spLocks noGrp="1" noRot="1" noChangeAspect="1"/>
           </p:cNvSpPr>
@@ -3474,7 +3474,7 @@
       </p:sp>
       <p:sp>
         <p:nvSpPr>
-          <p:cNvPr id="317" name="Google Shape;317;p25:notes"/>
+          <p:cNvPr id="318" name="Google Shape;318;p25:notes"/>
           <p:cNvSpPr txBox="1">
             <a:spLocks noGrp="1"/>
           </p:cNvSpPr>
@@ -4019,7 +4019,7 @@
   <p:cSld>
     <p:spTree>
       <p:nvGrpSpPr>
-        <p:cNvPr id="1" name="Shape 114"/>
+        <p:cNvPr id="1" name="Shape 115"/>
         <p:cNvGrpSpPr/>
         <p:nvPr/>
       </p:nvGrpSpPr>
@@ -4033,7 +4033,7 @@
       </p:grpSpPr>
       <p:sp>
         <p:nvSpPr>
-          <p:cNvPr id="115" name="Google Shape;115;g39318675434_2_0:notes"/>
+          <p:cNvPr id="116" name="Google Shape;116;g39318675434_2_0:notes"/>
           <p:cNvSpPr>
             <a:spLocks noGrp="1" noRot="1" noChangeAspect="1"/>
           </p:cNvSpPr>
@@ -4084,7 +4084,7 @@
       </p:sp>
       <p:sp>
         <p:nvSpPr>
-          <p:cNvPr id="116" name="Google Shape;116;g39318675434_2_0:notes"/>
+          <p:cNvPr id="117" name="Google Shape;117;g39318675434_2_0:notes"/>
           <p:cNvSpPr txBox="1">
             <a:spLocks noGrp="1"/>
           </p:cNvSpPr>
@@ -4141,7 +4141,7 @@
   <p:cSld>
     <p:spTree>
       <p:nvGrpSpPr>
-        <p:cNvPr id="1" name="Shape 120"/>
+        <p:cNvPr id="1" name="Shape 121"/>
         <p:cNvGrpSpPr/>
         <p:nvPr/>
       </p:nvGrpSpPr>
@@ -4155,7 +4155,7 @@
       </p:grpSpPr>
       <p:sp>
         <p:nvSpPr>
-          <p:cNvPr id="121" name="Google Shape;121;g3d00f0b5581_0_6:notes"/>
+          <p:cNvPr id="122" name="Google Shape;122;g3d00f0b5581_0_6:notes"/>
           <p:cNvSpPr>
             <a:spLocks noGrp="1" noRot="1" noChangeAspect="1"/>
           </p:cNvSpPr>
@@ -4206,7 +4206,7 @@
       </p:sp>
       <p:sp>
         <p:nvSpPr>
-          <p:cNvPr id="122" name="Google Shape;122;g3d00f0b5581_0_6:notes"/>
+          <p:cNvPr id="123" name="Google Shape;123;g3d00f0b5581_0_6:notes"/>
           <p:cNvSpPr txBox="1">
             <a:spLocks noGrp="1"/>
           </p:cNvSpPr>
@@ -4263,7 +4263,7 @@
   <p:cSld>
     <p:spTree>
       <p:nvGrpSpPr>
-        <p:cNvPr id="1" name="Shape 128"/>
+        <p:cNvPr id="1" name="Shape 129"/>
         <p:cNvGrpSpPr/>
         <p:nvPr/>
       </p:nvGrpSpPr>
@@ -4277,7 +4277,7 @@
       </p:grpSpPr>
       <p:sp>
         <p:nvSpPr>
-          <p:cNvPr id="129" name="Google Shape;129;g396d6590252_0_0:notes"/>
+          <p:cNvPr id="130" name="Google Shape;130;g396d6590252_0_0:notes"/>
           <p:cNvSpPr>
             <a:spLocks noGrp="1" noRot="1" noChangeAspect="1"/>
           </p:cNvSpPr>
@@ -4328,7 +4328,7 @@
       </p:sp>
       <p:sp>
         <p:nvSpPr>
-          <p:cNvPr id="130" name="Google Shape;130;g396d6590252_0_0:notes"/>
+          <p:cNvPr id="131" name="Google Shape;131;g396d6590252_0_0:notes"/>
           <p:cNvSpPr txBox="1">
             <a:spLocks noGrp="1"/>
           </p:cNvSpPr>
@@ -15583,7 +15583,7 @@
   <p:cSld>
     <p:spTree>
       <p:nvGrpSpPr>
-        <p:cNvPr id="1" name="Shape 138"/>
+        <p:cNvPr id="1" name="Shape 139"/>
         <p:cNvGrpSpPr/>
         <p:nvPr/>
       </p:nvGrpSpPr>
@@ -15597,7 +15597,7 @@
       </p:grpSpPr>
       <p:sp>
         <p:nvSpPr>
-          <p:cNvPr id="139" name="Google Shape;139;p24"/>
+          <p:cNvPr id="140" name="Google Shape;140;p24"/>
           <p:cNvSpPr txBox="1"/>
           <p:nvPr/>
         </p:nvSpPr>
@@ -15663,7 +15663,7 @@
       </p:sp>
       <p:sp>
         <p:nvSpPr>
-          <p:cNvPr id="140" name="Google Shape;140;p24"/>
+          <p:cNvPr id="141" name="Google Shape;141;p24"/>
           <p:cNvSpPr txBox="1"/>
           <p:nvPr/>
         </p:nvSpPr>
@@ -15995,7 +15995,7 @@
       </p:sp>
       <p:pic>
         <p:nvPicPr>
-          <p:cNvPr id="141" name="Google Shape;141;p24"/>
+          <p:cNvPr id="142" name="Google Shape;142;p24"/>
           <p:cNvPicPr preferRelativeResize="0"/>
           <p:nvPr/>
         </p:nvPicPr>
@@ -16023,7 +16023,7 @@
       </p:pic>
       <p:sp>
         <p:nvSpPr>
-          <p:cNvPr id="142" name="Google Shape;142;p24"/>
+          <p:cNvPr id="143" name="Google Shape;143;p24"/>
           <p:cNvSpPr txBox="1"/>
           <p:nvPr/>
         </p:nvSpPr>
@@ -16161,7 +16161,7 @@
   <p:cSld>
     <p:spTree>
       <p:nvGrpSpPr>
-        <p:cNvPr id="1" name="Shape 146"/>
+        <p:cNvPr id="1" name="Shape 147"/>
         <p:cNvGrpSpPr/>
         <p:nvPr/>
       </p:nvGrpSpPr>
@@ -16175,7 +16175,7 @@
       </p:grpSpPr>
       <p:sp>
         <p:nvSpPr>
-          <p:cNvPr id="147" name="Google Shape;147;p25"/>
+          <p:cNvPr id="148" name="Google Shape;148;p25"/>
           <p:cNvSpPr txBox="1"/>
           <p:nvPr/>
         </p:nvSpPr>
@@ -16241,7 +16241,7 @@
       </p:sp>
       <p:sp>
         <p:nvSpPr>
-          <p:cNvPr id="148" name="Google Shape;148;p25"/>
+          <p:cNvPr id="149" name="Google Shape;149;p25"/>
           <p:cNvSpPr txBox="1"/>
           <p:nvPr/>
         </p:nvSpPr>
@@ -16447,7 +16447,7 @@
       </p:sp>
       <p:pic>
         <p:nvPicPr>
-          <p:cNvPr id="149" name="Google Shape;149;p25"/>
+          <p:cNvPr id="150" name="Google Shape;150;p25"/>
           <p:cNvPicPr preferRelativeResize="0"/>
           <p:nvPr/>
         </p:nvPicPr>
@@ -16486,7 +16486,7 @@
       </p:pic>
       <p:sp>
         <p:nvSpPr>
-          <p:cNvPr id="150" name="Google Shape;150;p25"/>
+          <p:cNvPr id="151" name="Google Shape;151;p25"/>
           <p:cNvSpPr txBox="1"/>
           <p:nvPr/>
         </p:nvSpPr>
@@ -16813,7 +16813,7 @@
       </p:sp>
       <p:pic>
         <p:nvPicPr>
-          <p:cNvPr id="151" name="Google Shape;151;p25"/>
+          <p:cNvPr id="152" name="Google Shape;152;p25"/>
           <p:cNvPicPr preferRelativeResize="0"/>
           <p:nvPr/>
         </p:nvPicPr>
@@ -16863,7 +16863,7 @@
   <p:cSld>
     <p:spTree>
       <p:nvGrpSpPr>
-        <p:cNvPr id="1" name="Shape 155"/>
+        <p:cNvPr id="1" name="Shape 156"/>
         <p:cNvGrpSpPr/>
         <p:nvPr/>
       </p:nvGrpSpPr>
@@ -16877,7 +16877,7 @@
       </p:grpSpPr>
       <p:sp>
         <p:nvSpPr>
-          <p:cNvPr id="156" name="Google Shape;156;p26"/>
+          <p:cNvPr id="157" name="Google Shape;157;p26"/>
           <p:cNvSpPr txBox="1"/>
           <p:nvPr/>
         </p:nvSpPr>
@@ -16943,7 +16943,7 @@
       </p:sp>
       <p:sp>
         <p:nvSpPr>
-          <p:cNvPr id="157" name="Google Shape;157;p26"/>
+          <p:cNvPr id="158" name="Google Shape;158;p26"/>
           <p:cNvSpPr txBox="1"/>
           <p:nvPr/>
         </p:nvSpPr>
@@ -17202,7 +17202,7 @@
       </p:sp>
       <p:pic>
         <p:nvPicPr>
-          <p:cNvPr id="158" name="Google Shape;158;p26"/>
+          <p:cNvPr id="159" name="Google Shape;159;p26"/>
           <p:cNvPicPr preferRelativeResize="0"/>
           <p:nvPr/>
         </p:nvPicPr>
@@ -17252,7 +17252,7 @@
   <p:cSld>
     <p:spTree>
       <p:nvGrpSpPr>
-        <p:cNvPr id="1" name="Shape 162"/>
+        <p:cNvPr id="1" name="Shape 163"/>
         <p:cNvGrpSpPr/>
         <p:nvPr/>
       </p:nvGrpSpPr>
@@ -17266,7 +17266,7 @@
       </p:grpSpPr>
       <p:sp>
         <p:nvSpPr>
-          <p:cNvPr id="163" name="Google Shape;163;p27"/>
+          <p:cNvPr id="164" name="Google Shape;164;p27"/>
           <p:cNvSpPr txBox="1"/>
           <p:nvPr/>
         </p:nvSpPr>
@@ -17332,7 +17332,7 @@
       </p:sp>
       <p:sp>
         <p:nvSpPr>
-          <p:cNvPr id="164" name="Google Shape;164;p27"/>
+          <p:cNvPr id="165" name="Google Shape;165;p27"/>
           <p:cNvSpPr txBox="1"/>
           <p:nvPr/>
         </p:nvSpPr>
@@ -17791,7 +17791,7 @@
       </p:sp>
       <p:pic>
         <p:nvPicPr>
-          <p:cNvPr id="165" name="Google Shape;165;p27"/>
+          <p:cNvPr id="166" name="Google Shape;166;p27"/>
           <p:cNvPicPr preferRelativeResize="0"/>
           <p:nvPr/>
         </p:nvPicPr>
@@ -17819,7 +17819,7 @@
       </p:pic>
       <p:sp>
         <p:nvSpPr>
-          <p:cNvPr id="166" name="Google Shape;166;p27"/>
+          <p:cNvPr id="167" name="Google Shape;167;p27"/>
           <p:cNvSpPr txBox="1"/>
           <p:nvPr/>
         </p:nvSpPr>
@@ -18702,7 +18702,7 @@
   <p:cSld>
     <p:spTree>
       <p:nvGrpSpPr>
-        <p:cNvPr id="1" name="Shape 170"/>
+        <p:cNvPr id="1" name="Shape 171"/>
         <p:cNvGrpSpPr/>
         <p:nvPr/>
       </p:nvGrpSpPr>
@@ -18716,7 +18716,7 @@
       </p:grpSpPr>
       <p:sp>
         <p:nvSpPr>
-          <p:cNvPr id="171" name="Google Shape;171;p28"/>
+          <p:cNvPr id="172" name="Google Shape;172;p28"/>
           <p:cNvSpPr txBox="1"/>
           <p:nvPr/>
         </p:nvSpPr>
@@ -18987,7 +18987,7 @@
       </p:sp>
       <p:sp>
         <p:nvSpPr>
-          <p:cNvPr id="172" name="Google Shape;172;p28"/>
+          <p:cNvPr id="173" name="Google Shape;173;p28"/>
           <p:cNvSpPr txBox="1"/>
           <p:nvPr/>
         </p:nvSpPr>
@@ -19053,7 +19053,7 @@
       </p:sp>
       <p:pic>
         <p:nvPicPr>
-          <p:cNvPr id="173" name="Google Shape;173;p28"/>
+          <p:cNvPr id="174" name="Google Shape;174;p28"/>
           <p:cNvPicPr preferRelativeResize="0"/>
           <p:nvPr/>
         </p:nvPicPr>
@@ -19092,7 +19092,7 @@
       </p:pic>
       <p:sp>
         <p:nvSpPr>
-          <p:cNvPr id="174" name="Google Shape;174;p28"/>
+          <p:cNvPr id="175" name="Google Shape;175;p28"/>
           <p:cNvSpPr txBox="1"/>
           <p:nvPr/>
         </p:nvSpPr>
@@ -19247,7 +19247,7 @@
       </p:sp>
       <p:pic>
         <p:nvPicPr>
-          <p:cNvPr id="175" name="Google Shape;175;p28"/>
+          <p:cNvPr id="176" name="Google Shape;176;p28"/>
           <p:cNvPicPr preferRelativeResize="0"/>
           <p:nvPr/>
         </p:nvPicPr>
@@ -19280,7 +19280,7 @@
       </p:pic>
       <p:sp>
         <p:nvSpPr>
-          <p:cNvPr id="176" name="Google Shape;176;p28"/>
+          <p:cNvPr id="177" name="Google Shape;177;p28"/>
           <p:cNvSpPr txBox="1"/>
           <p:nvPr/>
         </p:nvSpPr>
@@ -19554,7 +19554,7 @@
       </p:sp>
       <p:pic>
         <p:nvPicPr>
-          <p:cNvPr id="177" name="Google Shape;177;p28"/>
+          <p:cNvPr id="178" name="Google Shape;178;p28"/>
           <p:cNvPicPr preferRelativeResize="0"/>
           <p:nvPr/>
         </p:nvPicPr>
@@ -19598,7 +19598,7 @@
   <p:cSld>
     <p:spTree>
       <p:nvGrpSpPr>
-        <p:cNvPr id="1" name="Shape 181"/>
+        <p:cNvPr id="1" name="Shape 182"/>
         <p:cNvGrpSpPr/>
         <p:nvPr/>
       </p:nvGrpSpPr>
@@ -19612,7 +19612,7 @@
       </p:grpSpPr>
       <p:sp>
         <p:nvSpPr>
-          <p:cNvPr id="182" name="Google Shape;182;p29"/>
+          <p:cNvPr id="183" name="Google Shape;183;p29"/>
           <p:cNvSpPr txBox="1"/>
           <p:nvPr/>
         </p:nvSpPr>
@@ -19678,7 +19678,7 @@
       </p:sp>
       <p:sp>
         <p:nvSpPr>
-          <p:cNvPr id="183" name="Google Shape;183;p29"/>
+          <p:cNvPr id="184" name="Google Shape;184;p29"/>
           <p:cNvSpPr txBox="1"/>
           <p:nvPr/>
         </p:nvSpPr>
@@ -19885,7 +19885,7 @@
       </p:sp>
       <p:pic>
         <p:nvPicPr>
-          <p:cNvPr id="184" name="Google Shape;184;p29"/>
+          <p:cNvPr id="185" name="Google Shape;185;p29"/>
           <p:cNvPicPr preferRelativeResize="0"/>
           <p:nvPr/>
         </p:nvPicPr>
@@ -19924,7 +19924,7 @@
       </p:pic>
       <p:sp>
         <p:nvSpPr>
-          <p:cNvPr id="185" name="Google Shape;185;p29"/>
+          <p:cNvPr id="186" name="Google Shape;186;p29"/>
           <p:cNvSpPr/>
           <p:nvPr/>
         </p:nvSpPr>
@@ -19973,7 +19973,7 @@
       </p:sp>
       <p:sp>
         <p:nvSpPr>
-          <p:cNvPr id="186" name="Google Shape;186;p29"/>
+          <p:cNvPr id="187" name="Google Shape;187;p29"/>
           <p:cNvSpPr txBox="1"/>
           <p:nvPr/>
         </p:nvSpPr>
@@ -20100,7 +20100,7 @@
       </p:sp>
       <p:pic>
         <p:nvPicPr>
-          <p:cNvPr id="187" name="Google Shape;187;p29"/>
+          <p:cNvPr id="188" name="Google Shape;188;p29"/>
           <p:cNvPicPr preferRelativeResize="0"/>
           <p:nvPr/>
         </p:nvPicPr>
@@ -20139,7 +20139,7 @@
       </p:pic>
       <p:sp>
         <p:nvSpPr>
-          <p:cNvPr id="188" name="Google Shape;188;p29"/>
+          <p:cNvPr id="189" name="Google Shape;189;p29"/>
           <p:cNvSpPr txBox="1"/>
           <p:nvPr/>
         </p:nvSpPr>
@@ -20445,7 +20445,7 @@
       </p:sp>
       <p:pic>
         <p:nvPicPr>
-          <p:cNvPr id="189" name="Google Shape;189;p29"/>
+          <p:cNvPr id="190" name="Google Shape;190;p29"/>
           <p:cNvPicPr preferRelativeResize="0"/>
           <p:nvPr/>
         </p:nvPicPr>
@@ -20495,7 +20495,7 @@
   <p:cSld>
     <p:spTree>
       <p:nvGrpSpPr>
-        <p:cNvPr id="1" name="Shape 193"/>
+        <p:cNvPr id="1" name="Shape 194"/>
         <p:cNvGrpSpPr/>
         <p:nvPr/>
       </p:nvGrpSpPr>
@@ -20509,7 +20509,7 @@
       </p:grpSpPr>
       <p:sp>
         <p:nvSpPr>
-          <p:cNvPr id="194" name="Google Shape;194;p30"/>
+          <p:cNvPr id="195" name="Google Shape;195;p30"/>
           <p:cNvSpPr txBox="1"/>
           <p:nvPr/>
         </p:nvSpPr>
@@ -20575,7 +20575,7 @@
       </p:sp>
       <p:sp>
         <p:nvSpPr>
-          <p:cNvPr id="195" name="Google Shape;195;p30"/>
+          <p:cNvPr id="196" name="Google Shape;196;p30"/>
           <p:cNvSpPr txBox="1"/>
           <p:nvPr/>
         </p:nvSpPr>
@@ -20902,7 +20902,7 @@
       </p:sp>
       <p:sp>
         <p:nvSpPr>
-          <p:cNvPr id="196" name="Google Shape;196;p30"/>
+          <p:cNvPr id="197" name="Google Shape;197;p30"/>
           <p:cNvSpPr txBox="1"/>
           <p:nvPr/>
         </p:nvSpPr>
@@ -21109,7 +21109,7 @@
       </p:sp>
       <p:pic>
         <p:nvPicPr>
-          <p:cNvPr id="197" name="Google Shape;197;p30"/>
+          <p:cNvPr id="198" name="Google Shape;198;p30"/>
           <p:cNvPicPr preferRelativeResize="0"/>
           <p:nvPr/>
         </p:nvPicPr>
@@ -21148,7 +21148,7 @@
       </p:pic>
       <p:pic>
         <p:nvPicPr>
-          <p:cNvPr id="198" name="Google Shape;198;p30"/>
+          <p:cNvPr id="199" name="Google Shape;199;p30"/>
           <p:cNvPicPr preferRelativeResize="0"/>
           <p:nvPr/>
         </p:nvPicPr>
@@ -21193,7 +21193,7 @@
   <p:cSld>
     <p:spTree>
       <p:nvGrpSpPr>
-        <p:cNvPr id="1" name="Shape 202"/>
+        <p:cNvPr id="1" name="Shape 203"/>
         <p:cNvGrpSpPr/>
         <p:nvPr/>
       </p:nvGrpSpPr>
@@ -21207,7 +21207,7 @@
       </p:grpSpPr>
       <p:sp>
         <p:nvSpPr>
-          <p:cNvPr id="203" name="Google Shape;203;p31"/>
+          <p:cNvPr id="204" name="Google Shape;204;p31"/>
           <p:cNvSpPr txBox="1"/>
           <p:nvPr/>
         </p:nvSpPr>
@@ -21273,7 +21273,7 @@
       </p:sp>
       <p:sp>
         <p:nvSpPr>
-          <p:cNvPr id="204" name="Google Shape;204;p31"/>
+          <p:cNvPr id="205" name="Google Shape;205;p31"/>
           <p:cNvSpPr txBox="1"/>
           <p:nvPr/>
         </p:nvSpPr>
@@ -21640,7 +21640,7 @@
       </p:sp>
       <p:sp>
         <p:nvSpPr>
-          <p:cNvPr id="205" name="Google Shape;205;p31"/>
+          <p:cNvPr id="206" name="Google Shape;206;p31"/>
           <p:cNvSpPr txBox="1"/>
           <p:nvPr/>
         </p:nvSpPr>
@@ -21927,7 +21927,7 @@
       </p:sp>
       <p:pic>
         <p:nvPicPr>
-          <p:cNvPr id="206" name="Google Shape;206;p31"/>
+          <p:cNvPr id="207" name="Google Shape;207;p31"/>
           <p:cNvPicPr preferRelativeResize="0"/>
           <p:nvPr/>
         </p:nvPicPr>
@@ -21961,7 +21961,7 @@
       </p:pic>
       <p:pic>
         <p:nvPicPr>
-          <p:cNvPr id="207" name="Google Shape;207;p31"/>
+          <p:cNvPr id="208" name="Google Shape;208;p31"/>
           <p:cNvPicPr preferRelativeResize="0"/>
           <p:nvPr/>
         </p:nvPicPr>
@@ -22006,7 +22006,7 @@
   <p:cSld>
     <p:spTree>
       <p:nvGrpSpPr>
-        <p:cNvPr id="1" name="Shape 211"/>
+        <p:cNvPr id="1" name="Shape 212"/>
         <p:cNvGrpSpPr/>
         <p:nvPr/>
       </p:nvGrpSpPr>
@@ -22020,7 +22020,7 @@
       </p:grpSpPr>
       <p:sp>
         <p:nvSpPr>
-          <p:cNvPr id="212" name="Google Shape;212;p32"/>
+          <p:cNvPr id="213" name="Google Shape;213;p32"/>
           <p:cNvSpPr txBox="1"/>
           <p:nvPr/>
         </p:nvSpPr>
@@ -22086,7 +22086,7 @@
       </p:sp>
       <p:sp>
         <p:nvSpPr>
-          <p:cNvPr id="213" name="Google Shape;213;p32"/>
+          <p:cNvPr id="214" name="Google Shape;214;p32"/>
           <p:cNvSpPr txBox="1"/>
           <p:nvPr/>
         </p:nvSpPr>
@@ -22461,7 +22461,7 @@
       </p:sp>
       <p:sp>
         <p:nvSpPr>
-          <p:cNvPr id="214" name="Google Shape;214;p32"/>
+          <p:cNvPr id="215" name="Google Shape;215;p32"/>
           <p:cNvSpPr txBox="1"/>
           <p:nvPr/>
         </p:nvSpPr>
@@ -23250,7 +23250,7 @@
       </p:sp>
       <p:sp>
         <p:nvSpPr>
-          <p:cNvPr id="215" name="Google Shape;215;p32"/>
+          <p:cNvPr id="216" name="Google Shape;216;p32"/>
           <p:cNvSpPr txBox="1"/>
           <p:nvPr/>
         </p:nvSpPr>
@@ -23336,7 +23336,7 @@
       </p:sp>
       <p:pic>
         <p:nvPicPr>
-          <p:cNvPr id="216" name="Google Shape;216;p32"/>
+          <p:cNvPr id="217" name="Google Shape;217;p32"/>
           <p:cNvPicPr preferRelativeResize="0"/>
           <p:nvPr/>
         </p:nvPicPr>
@@ -23375,7 +23375,7 @@
       </p:pic>
       <p:pic>
         <p:nvPicPr>
-          <p:cNvPr id="217" name="Google Shape;217;p32"/>
+          <p:cNvPr id="218" name="Google Shape;218;p32"/>
           <p:cNvPicPr preferRelativeResize="0"/>
           <p:nvPr/>
         </p:nvPicPr>
@@ -23420,7 +23420,7 @@
   <p:cSld>
     <p:spTree>
       <p:nvGrpSpPr>
-        <p:cNvPr id="1" name="Shape 221"/>
+        <p:cNvPr id="1" name="Shape 222"/>
         <p:cNvGrpSpPr/>
         <p:nvPr/>
       </p:nvGrpSpPr>
@@ -23434,7 +23434,7 @@
       </p:grpSpPr>
       <p:sp>
         <p:nvSpPr>
-          <p:cNvPr id="222" name="Google Shape;222;p33"/>
+          <p:cNvPr id="223" name="Google Shape;223;p33"/>
           <p:cNvSpPr txBox="1"/>
           <p:nvPr/>
         </p:nvSpPr>
@@ -23500,7 +23500,7 @@
       </p:sp>
       <p:sp>
         <p:nvSpPr>
-          <p:cNvPr id="223" name="Google Shape;223;p33"/>
+          <p:cNvPr id="224" name="Google Shape;224;p33"/>
           <p:cNvSpPr txBox="1"/>
           <p:nvPr/>
         </p:nvSpPr>
@@ -23719,7 +23719,7 @@
       </p:sp>
       <p:pic>
         <p:nvPicPr>
-          <p:cNvPr id="224" name="Google Shape;224;p33"/>
+          <p:cNvPr id="225" name="Google Shape;225;p33"/>
           <p:cNvPicPr preferRelativeResize="0"/>
           <p:nvPr/>
         </p:nvPicPr>
@@ -23758,7 +23758,7 @@
       </p:pic>
       <p:sp>
         <p:nvSpPr>
-          <p:cNvPr id="225" name="Google Shape;225;p33"/>
+          <p:cNvPr id="226" name="Google Shape;226;p33"/>
           <p:cNvSpPr txBox="1"/>
           <p:nvPr/>
         </p:nvSpPr>
@@ -24033,7 +24033,7 @@
       </p:sp>
       <p:pic>
         <p:nvPicPr>
-          <p:cNvPr id="226" name="Google Shape;226;p33"/>
+          <p:cNvPr id="227" name="Google Shape;227;p33"/>
           <p:cNvPicPr preferRelativeResize="0"/>
           <p:nvPr/>
         </p:nvPicPr>
@@ -24072,7 +24072,7 @@
       </p:pic>
       <p:pic>
         <p:nvPicPr>
-          <p:cNvPr id="227" name="Google Shape;227;p33"/>
+          <p:cNvPr id="228" name="Google Shape;228;p33"/>
           <p:cNvPicPr preferRelativeResize="0"/>
           <p:nvPr/>
         </p:nvPicPr>
@@ -24453,7 +24453,7 @@
   <p:cSld>
     <p:spTree>
       <p:nvGrpSpPr>
-        <p:cNvPr id="1" name="Shape 231"/>
+        <p:cNvPr id="1" name="Shape 232"/>
         <p:cNvGrpSpPr/>
         <p:nvPr/>
       </p:nvGrpSpPr>
@@ -24467,7 +24467,7 @@
       </p:grpSpPr>
       <p:sp>
         <p:nvSpPr>
-          <p:cNvPr id="232" name="Google Shape;232;p34"/>
+          <p:cNvPr id="233" name="Google Shape;233;p34"/>
           <p:cNvSpPr txBox="1"/>
           <p:nvPr/>
         </p:nvSpPr>
@@ -24533,7 +24533,7 @@
       </p:sp>
       <p:sp>
         <p:nvSpPr>
-          <p:cNvPr id="233" name="Google Shape;233;p34"/>
+          <p:cNvPr id="234" name="Google Shape;234;p34"/>
           <p:cNvSpPr txBox="1"/>
           <p:nvPr/>
         </p:nvSpPr>
@@ -25150,7 +25150,7 @@
       </p:sp>
       <p:pic>
         <p:nvPicPr>
-          <p:cNvPr id="234" name="Google Shape;234;p34"/>
+          <p:cNvPr id="235" name="Google Shape;235;p34"/>
           <p:cNvPicPr preferRelativeResize="0"/>
           <p:nvPr/>
         </p:nvPicPr>
@@ -25200,7 +25200,7 @@
   <p:cSld>
     <p:spTree>
       <p:nvGrpSpPr>
-        <p:cNvPr id="1" name="Shape 238"/>
+        <p:cNvPr id="1" name="Shape 239"/>
         <p:cNvGrpSpPr/>
         <p:nvPr/>
       </p:nvGrpSpPr>
@@ -25214,7 +25214,7 @@
       </p:grpSpPr>
       <p:sp>
         <p:nvSpPr>
-          <p:cNvPr id="239" name="Google Shape;239;p35"/>
+          <p:cNvPr id="240" name="Google Shape;240;p35"/>
           <p:cNvSpPr txBox="1"/>
           <p:nvPr/>
         </p:nvSpPr>
@@ -25280,7 +25280,7 @@
       </p:sp>
       <p:sp>
         <p:nvSpPr>
-          <p:cNvPr id="240" name="Google Shape;240;p35"/>
+          <p:cNvPr id="241" name="Google Shape;241;p35"/>
           <p:cNvSpPr txBox="1"/>
           <p:nvPr/>
         </p:nvSpPr>
@@ -25555,7 +25555,7 @@
       </p:sp>
       <p:pic>
         <p:nvPicPr>
-          <p:cNvPr id="241" name="Google Shape;241;p35"/>
+          <p:cNvPr id="242" name="Google Shape;242;p35"/>
           <p:cNvPicPr preferRelativeResize="0"/>
           <p:nvPr/>
         </p:nvPicPr>
@@ -25594,7 +25594,7 @@
       </p:pic>
       <p:sp>
         <p:nvSpPr>
-          <p:cNvPr id="242" name="Google Shape;242;p35"/>
+          <p:cNvPr id="243" name="Google Shape;243;p35"/>
           <p:cNvSpPr txBox="1"/>
           <p:nvPr/>
         </p:nvSpPr>
@@ -25917,7 +25917,7 @@
       </p:sp>
       <p:sp>
         <p:nvSpPr>
-          <p:cNvPr id="243" name="Google Shape;243;p35"/>
+          <p:cNvPr id="244" name="Google Shape;244;p35"/>
           <p:cNvSpPr txBox="1"/>
           <p:nvPr/>
         </p:nvSpPr>
@@ -26090,7 +26090,7 @@
   <p:cSld>
     <p:spTree>
       <p:nvGrpSpPr>
-        <p:cNvPr id="1" name="Shape 247"/>
+        <p:cNvPr id="1" name="Shape 248"/>
         <p:cNvGrpSpPr/>
         <p:nvPr/>
       </p:nvGrpSpPr>
@@ -26104,7 +26104,7 @@
       </p:grpSpPr>
       <p:sp>
         <p:nvSpPr>
-          <p:cNvPr id="248" name="Google Shape;248;p36"/>
+          <p:cNvPr id="249" name="Google Shape;249;p36"/>
           <p:cNvSpPr txBox="1"/>
           <p:nvPr/>
         </p:nvSpPr>
@@ -26170,7 +26170,7 @@
       </p:sp>
       <p:sp>
         <p:nvSpPr>
-          <p:cNvPr id="249" name="Google Shape;249;p36"/>
+          <p:cNvPr id="250" name="Google Shape;250;p36"/>
           <p:cNvSpPr txBox="1"/>
           <p:nvPr/>
         </p:nvSpPr>
@@ -26457,7 +26457,7 @@
       </p:sp>
       <p:sp>
         <p:nvSpPr>
-          <p:cNvPr id="250" name="Google Shape;250;p36"/>
+          <p:cNvPr id="251" name="Google Shape;251;p36"/>
           <p:cNvSpPr txBox="1"/>
           <p:nvPr/>
         </p:nvSpPr>
@@ -26865,7 +26865,7 @@
       </p:sp>
       <p:sp>
         <p:nvSpPr>
-          <p:cNvPr id="251" name="Google Shape;251;p36"/>
+          <p:cNvPr id="252" name="Google Shape;252;p36"/>
           <p:cNvSpPr txBox="1"/>
           <p:nvPr/>
         </p:nvSpPr>
@@ -27276,7 +27276,7 @@
       </p:sp>
       <p:pic>
         <p:nvPicPr>
-          <p:cNvPr id="252" name="Google Shape;252;p36"/>
+          <p:cNvPr id="253" name="Google Shape;253;p36"/>
           <p:cNvPicPr preferRelativeResize="0"/>
           <p:nvPr/>
         </p:nvPicPr>
@@ -27315,7 +27315,7 @@
       </p:pic>
       <p:pic>
         <p:nvPicPr>
-          <p:cNvPr id="253" name="Google Shape;253;p36"/>
+          <p:cNvPr id="254" name="Google Shape;254;p36"/>
           <p:cNvPicPr preferRelativeResize="0"/>
           <p:nvPr/>
         </p:nvPicPr>
@@ -27365,7 +27365,7 @@
   <p:cSld>
     <p:spTree>
       <p:nvGrpSpPr>
-        <p:cNvPr id="1" name="Shape 257"/>
+        <p:cNvPr id="1" name="Shape 258"/>
         <p:cNvGrpSpPr/>
         <p:nvPr/>
       </p:nvGrpSpPr>
@@ -27379,7 +27379,7 @@
       </p:grpSpPr>
       <p:sp>
         <p:nvSpPr>
-          <p:cNvPr id="258" name="Google Shape;258;p37"/>
+          <p:cNvPr id="259" name="Google Shape;259;p37"/>
           <p:cNvSpPr txBox="1"/>
           <p:nvPr/>
         </p:nvSpPr>
@@ -27445,7 +27445,7 @@
       </p:sp>
       <p:sp>
         <p:nvSpPr>
-          <p:cNvPr id="259" name="Google Shape;259;p37"/>
+          <p:cNvPr id="260" name="Google Shape;260;p37"/>
           <p:cNvSpPr txBox="1"/>
           <p:nvPr/>
         </p:nvSpPr>
@@ -27640,7 +27640,7 @@
       </p:sp>
       <p:sp>
         <p:nvSpPr>
-          <p:cNvPr id="260" name="Google Shape;260;p37"/>
+          <p:cNvPr id="261" name="Google Shape;261;p37"/>
           <p:cNvSpPr txBox="1"/>
           <p:nvPr/>
         </p:nvSpPr>
@@ -27927,7 +27927,7 @@
       </p:sp>
       <p:sp>
         <p:nvSpPr>
-          <p:cNvPr id="261" name="Google Shape;261;p37"/>
+          <p:cNvPr id="262" name="Google Shape;262;p37"/>
           <p:cNvSpPr txBox="1"/>
           <p:nvPr/>
         </p:nvSpPr>
@@ -28162,7 +28162,7 @@
       </p:sp>
       <p:pic>
         <p:nvPicPr>
-          <p:cNvPr id="262" name="Google Shape;262;p37"/>
+          <p:cNvPr id="263" name="Google Shape;263;p37"/>
           <p:cNvPicPr preferRelativeResize="0"/>
           <p:nvPr/>
         </p:nvPicPr>
@@ -28201,7 +28201,7 @@
       </p:pic>
       <p:pic>
         <p:nvPicPr>
-          <p:cNvPr id="263" name="Google Shape;263;p37"/>
+          <p:cNvPr id="264" name="Google Shape;264;p37"/>
           <p:cNvPicPr preferRelativeResize="0"/>
           <p:nvPr/>
         </p:nvPicPr>
@@ -28239,7 +28239,7 @@
       </p:pic>
       <p:pic>
         <p:nvPicPr>
-          <p:cNvPr id="264" name="Google Shape;264;p37"/>
+          <p:cNvPr id="265" name="Google Shape;265;p37"/>
           <p:cNvPicPr preferRelativeResize="0"/>
           <p:nvPr/>
         </p:nvPicPr>
@@ -28289,7 +28289,7 @@
   <p:cSld>
     <p:spTree>
       <p:nvGrpSpPr>
-        <p:cNvPr id="1" name="Shape 268"/>
+        <p:cNvPr id="1" name="Shape 269"/>
         <p:cNvGrpSpPr/>
         <p:nvPr/>
       </p:nvGrpSpPr>
@@ -28303,7 +28303,7 @@
       </p:grpSpPr>
       <p:sp>
         <p:nvSpPr>
-          <p:cNvPr id="269" name="Google Shape;269;p38"/>
+          <p:cNvPr id="270" name="Google Shape;270;p38"/>
           <p:cNvSpPr txBox="1"/>
           <p:nvPr/>
         </p:nvSpPr>
@@ -28369,7 +28369,7 @@
       </p:sp>
       <p:sp>
         <p:nvSpPr>
-          <p:cNvPr id="270" name="Google Shape;270;p38"/>
+          <p:cNvPr id="271" name="Google Shape;271;p38"/>
           <p:cNvSpPr txBox="1"/>
           <p:nvPr/>
         </p:nvSpPr>
@@ -28576,7 +28576,7 @@
       </p:sp>
       <p:sp>
         <p:nvSpPr>
-          <p:cNvPr id="271" name="Google Shape;271;p38"/>
+          <p:cNvPr id="272" name="Google Shape;272;p38"/>
           <p:cNvSpPr txBox="1"/>
           <p:nvPr/>
         </p:nvSpPr>
@@ -28863,7 +28863,7 @@
       </p:sp>
       <p:sp>
         <p:nvSpPr>
-          <p:cNvPr id="272" name="Google Shape;272;p38"/>
+          <p:cNvPr id="273" name="Google Shape;273;p38"/>
           <p:cNvSpPr txBox="1"/>
           <p:nvPr/>
         </p:nvSpPr>
@@ -29123,7 +29123,7 @@
       </p:sp>
       <p:pic>
         <p:nvPicPr>
-          <p:cNvPr id="273" name="Google Shape;273;p38"/>
+          <p:cNvPr id="274" name="Google Shape;274;p38"/>
           <p:cNvPicPr preferRelativeResize="0"/>
           <p:nvPr/>
         </p:nvPicPr>
@@ -29162,7 +29162,7 @@
       </p:pic>
       <p:pic>
         <p:nvPicPr>
-          <p:cNvPr id="274" name="Google Shape;274;p38"/>
+          <p:cNvPr id="275" name="Google Shape;275;p38"/>
           <p:cNvPicPr preferRelativeResize="0"/>
           <p:nvPr/>
         </p:nvPicPr>
@@ -29201,7 +29201,7 @@
       </p:pic>
       <p:pic>
         <p:nvPicPr>
-          <p:cNvPr id="275" name="Google Shape;275;p38"/>
+          <p:cNvPr id="276" name="Google Shape;276;p38"/>
           <p:cNvPicPr preferRelativeResize="0"/>
           <p:nvPr/>
         </p:nvPicPr>
@@ -29251,7 +29251,7 @@
   <p:cSld>
     <p:spTree>
       <p:nvGrpSpPr>
-        <p:cNvPr id="1" name="Shape 279"/>
+        <p:cNvPr id="1" name="Shape 280"/>
         <p:cNvGrpSpPr/>
         <p:nvPr/>
       </p:nvGrpSpPr>
@@ -29265,7 +29265,7 @@
       </p:grpSpPr>
       <p:sp>
         <p:nvSpPr>
-          <p:cNvPr id="280" name="Google Shape;280;p39"/>
+          <p:cNvPr id="281" name="Google Shape;281;p39"/>
           <p:cNvSpPr txBox="1"/>
           <p:nvPr/>
         </p:nvSpPr>
@@ -29331,7 +29331,7 @@
       </p:sp>
       <p:sp>
         <p:nvSpPr>
-          <p:cNvPr id="281" name="Google Shape;281;p39"/>
+          <p:cNvPr id="282" name="Google Shape;282;p39"/>
           <p:cNvSpPr txBox="1"/>
           <p:nvPr/>
         </p:nvSpPr>
@@ -29726,7 +29726,7 @@
       </p:sp>
       <p:sp>
         <p:nvSpPr>
-          <p:cNvPr id="282" name="Google Shape;282;p39"/>
+          <p:cNvPr id="283" name="Google Shape;283;p39"/>
           <p:cNvSpPr txBox="1"/>
           <p:nvPr/>
         </p:nvSpPr>
@@ -30077,7 +30077,7 @@
       </p:sp>
       <p:pic>
         <p:nvPicPr>
-          <p:cNvPr id="283" name="Google Shape;283;p39"/>
+          <p:cNvPr id="284" name="Google Shape;284;p39"/>
           <p:cNvPicPr preferRelativeResize="0"/>
           <p:nvPr/>
         </p:nvPicPr>
@@ -30116,7 +30116,7 @@
       </p:pic>
       <p:pic>
         <p:nvPicPr>
-          <p:cNvPr id="284" name="Google Shape;284;p39"/>
+          <p:cNvPr id="285" name="Google Shape;285;p39"/>
           <p:cNvPicPr preferRelativeResize="0"/>
           <p:nvPr/>
         </p:nvPicPr>
@@ -30154,7 +30154,7 @@
       </p:pic>
       <p:sp>
         <p:nvSpPr>
-          <p:cNvPr id="285" name="Google Shape;285;p39"/>
+          <p:cNvPr id="286" name="Google Shape;286;p39"/>
           <p:cNvSpPr txBox="1"/>
           <p:nvPr/>
         </p:nvSpPr>
@@ -30561,7 +30561,7 @@
       </p:sp>
       <p:pic>
         <p:nvPicPr>
-          <p:cNvPr id="286" name="Google Shape;286;p39"/>
+          <p:cNvPr id="287" name="Google Shape;287;p39"/>
           <p:cNvPicPr preferRelativeResize="0"/>
           <p:nvPr/>
         </p:nvPicPr>
@@ -30611,7 +30611,7 @@
   <p:cSld>
     <p:spTree>
       <p:nvGrpSpPr>
-        <p:cNvPr id="1" name="Shape 290"/>
+        <p:cNvPr id="1" name="Shape 291"/>
         <p:cNvGrpSpPr/>
         <p:nvPr/>
       </p:nvGrpSpPr>
@@ -30625,7 +30625,7 @@
       </p:grpSpPr>
       <p:sp>
         <p:nvSpPr>
-          <p:cNvPr id="291" name="Google Shape;291;p40"/>
+          <p:cNvPr id="292" name="Google Shape;292;p40"/>
           <p:cNvSpPr txBox="1"/>
           <p:nvPr/>
         </p:nvSpPr>
@@ -30691,7 +30691,7 @@
       </p:sp>
       <p:sp>
         <p:nvSpPr>
-          <p:cNvPr id="292" name="Google Shape;292;p40"/>
+          <p:cNvPr id="293" name="Google Shape;293;p40"/>
           <p:cNvSpPr txBox="1"/>
           <p:nvPr/>
         </p:nvSpPr>
@@ -30819,7 +30819,7 @@
       </p:sp>
       <p:sp>
         <p:nvSpPr>
-          <p:cNvPr id="293" name="Google Shape;293;p40"/>
+          <p:cNvPr id="294" name="Google Shape;294;p40"/>
           <p:cNvSpPr txBox="1"/>
           <p:nvPr/>
         </p:nvSpPr>
@@ -31089,7 +31089,7 @@
       </p:sp>
       <p:sp>
         <p:nvSpPr>
-          <p:cNvPr id="294" name="Google Shape;294;p40"/>
+          <p:cNvPr id="295" name="Google Shape;295;p40"/>
           <p:cNvSpPr txBox="1"/>
           <p:nvPr/>
         </p:nvSpPr>
@@ -31350,7 +31350,7 @@
       </p:sp>
       <p:pic>
         <p:nvPicPr>
-          <p:cNvPr id="295" name="Google Shape;295;p40"/>
+          <p:cNvPr id="296" name="Google Shape;296;p40"/>
           <p:cNvPicPr preferRelativeResize="0"/>
           <p:nvPr/>
         </p:nvPicPr>
@@ -31389,7 +31389,7 @@
       </p:pic>
       <p:pic>
         <p:nvPicPr>
-          <p:cNvPr id="296" name="Google Shape;296;p40"/>
+          <p:cNvPr id="297" name="Google Shape;297;p40"/>
           <p:cNvPicPr preferRelativeResize="0"/>
           <p:nvPr/>
         </p:nvPicPr>
@@ -31439,7 +31439,7 @@
   <p:cSld>
     <p:spTree>
       <p:nvGrpSpPr>
-        <p:cNvPr id="1" name="Shape 300"/>
+        <p:cNvPr id="1" name="Shape 301"/>
         <p:cNvGrpSpPr/>
         <p:nvPr/>
       </p:nvGrpSpPr>
@@ -31453,7 +31453,7 @@
       </p:grpSpPr>
       <p:pic>
         <p:nvPicPr>
-          <p:cNvPr id="301" name="Google Shape;301;p41"/>
+          <p:cNvPr id="302" name="Google Shape;302;p41"/>
           <p:cNvPicPr preferRelativeResize="0"/>
           <p:nvPr/>
         </p:nvPicPr>
@@ -31492,7 +31492,7 @@
       </p:pic>
       <p:sp>
         <p:nvSpPr>
-          <p:cNvPr id="302" name="Google Shape;302;p41"/>
+          <p:cNvPr id="303" name="Google Shape;303;p41"/>
           <p:cNvSpPr txBox="1"/>
           <p:nvPr/>
         </p:nvSpPr>
@@ -31558,7 +31558,7 @@
       </p:sp>
       <p:sp>
         <p:nvSpPr>
-          <p:cNvPr id="303" name="Google Shape;303;p41"/>
+          <p:cNvPr id="304" name="Google Shape;304;p41"/>
           <p:cNvSpPr txBox="1"/>
           <p:nvPr/>
         </p:nvSpPr>
@@ -31605,7 +31605,7 @@
       </p:sp>
       <p:sp>
         <p:nvSpPr>
-          <p:cNvPr id="304" name="Google Shape;304;p41"/>
+          <p:cNvPr id="305" name="Google Shape;305;p41"/>
           <p:cNvSpPr txBox="1"/>
           <p:nvPr/>
         </p:nvSpPr>
@@ -31776,7 +31776,7 @@
   <p:cSld>
     <p:spTree>
       <p:nvGrpSpPr>
-        <p:cNvPr id="1" name="Shape 308"/>
+        <p:cNvPr id="1" name="Shape 309"/>
         <p:cNvGrpSpPr/>
         <p:nvPr/>
       </p:nvGrpSpPr>
@@ -31790,7 +31790,7 @@
       </p:grpSpPr>
       <p:pic>
         <p:nvPicPr>
-          <p:cNvPr id="309" name="Google Shape;309;p42"/>
+          <p:cNvPr id="310" name="Google Shape;310;p42"/>
           <p:cNvPicPr preferRelativeResize="0"/>
           <p:nvPr/>
         </p:nvPicPr>
@@ -31822,7 +31822,7 @@
       </p:pic>
       <p:sp>
         <p:nvSpPr>
-          <p:cNvPr id="310" name="Google Shape;310;p42"/>
+          <p:cNvPr id="311" name="Google Shape;311;p42"/>
           <p:cNvSpPr txBox="1"/>
           <p:nvPr/>
         </p:nvSpPr>
@@ -31888,7 +31888,7 @@
       </p:sp>
       <p:sp>
         <p:nvSpPr>
-          <p:cNvPr id="311" name="Google Shape;311;p42"/>
+          <p:cNvPr id="312" name="Google Shape;312;p42"/>
           <p:cNvSpPr txBox="1"/>
           <p:nvPr/>
         </p:nvSpPr>
@@ -32318,7 +32318,7 @@
       </p:sp>
       <p:pic>
         <p:nvPicPr>
-          <p:cNvPr id="312" name="Google Shape;312;p42"/>
+          <p:cNvPr id="313" name="Google Shape;313;p42"/>
           <p:cNvPicPr preferRelativeResize="0"/>
           <p:nvPr/>
         </p:nvPicPr>
@@ -32350,7 +32350,7 @@
       </p:pic>
       <p:sp>
         <p:nvSpPr>
-          <p:cNvPr id="313" name="Google Shape;313;p42"/>
+          <p:cNvPr id="314" name="Google Shape;314;p42"/>
           <p:cNvSpPr txBox="1"/>
           <p:nvPr/>
         </p:nvSpPr>
@@ -32429,7 +32429,7 @@
       </p:sp>
       <p:sp>
         <p:nvSpPr>
-          <p:cNvPr id="314" name="Google Shape;314;p42"/>
+          <p:cNvPr id="315" name="Google Shape;315;p42"/>
           <p:cNvSpPr txBox="1"/>
           <p:nvPr/>
         </p:nvSpPr>
@@ -32506,7 +32506,7 @@
   <p:cSld>
     <p:spTree>
       <p:nvGrpSpPr>
-        <p:cNvPr id="1" name="Shape 318"/>
+        <p:cNvPr id="1" name="Shape 319"/>
         <p:cNvGrpSpPr/>
         <p:nvPr/>
       </p:nvGrpSpPr>
@@ -32520,7 +32520,7 @@
       </p:grpSpPr>
       <p:sp>
         <p:nvSpPr>
-          <p:cNvPr id="319" name="Google Shape;319;p43"/>
+          <p:cNvPr id="320" name="Google Shape;320;p43"/>
           <p:cNvSpPr txBox="1"/>
           <p:nvPr/>
         </p:nvSpPr>
@@ -34327,7 +34327,7 @@
             <a:tbl>
               <a:tblPr>
                 <a:noFill/>
-                <a:tableStyleId>{FB1F33A7-B2AF-483A-BE4A-99AC1B07CAA7}</a:tableStyleId>
+                <a:tableStyleId>{A5E88B85-8F5D-4149-9D63-61A149343B79}</a:tableStyleId>
               </a:tblPr>
               <a:tblGrid>
                 <a:gridCol w="219050">
@@ -34696,7 +34696,7 @@
             <a:tbl>
               <a:tblPr>
                 <a:noFill/>
-                <a:tableStyleId>{FB1F33A7-B2AF-483A-BE4A-99AC1B07CAA7}</a:tableStyleId>
+                <a:tableStyleId>{A5E88B85-8F5D-4149-9D63-61A149343B79}</a:tableStyleId>
               </a:tblPr>
               <a:tblGrid>
                 <a:gridCol w="247650">
@@ -41031,7 +41031,7 @@
             <a:tbl>
               <a:tblPr>
                 <a:noFill/>
-                <a:tableStyleId>{FB1F33A7-B2AF-483A-BE4A-99AC1B07CAA7}</a:tableStyleId>
+                <a:tableStyleId>{A5E88B85-8F5D-4149-9D63-61A149343B79}</a:tableStyleId>
               </a:tblPr>
               <a:tblGrid>
                 <a:gridCol w="247650">
@@ -50832,6 +50832,40 @@
           </a:p>
         </p:txBody>
       </p:sp>
+      <p:pic>
+        <p:nvPicPr>
+          <p:cNvPr id="114" name="Google Shape;114;p20"/>
+          <p:cNvPicPr preferRelativeResize="0"/>
+          <p:nvPr/>
+        </p:nvPicPr>
+        <p:blipFill>
+          <a:blip r:embed="rId7">
+            <a:alphaModFix/>
+          </a:blip>
+          <a:stretch>
+            <a:fillRect/>
+          </a:stretch>
+        </p:blipFill>
+        <p:spPr>
+          <a:xfrm>
+            <a:off x="4651908" y="248150"/>
+            <a:ext cx="2857500" cy="1600200"/>
+          </a:xfrm>
+          <a:prstGeom prst="rect">
+            <a:avLst/>
+          </a:prstGeom>
+          <a:noFill/>
+          <a:ln w="9525" cap="flat" cmpd="sng">
+            <a:solidFill>
+              <a:srgbClr val="FF0000"/>
+            </a:solidFill>
+            <a:prstDash val="solid"/>
+            <a:round/>
+            <a:headEnd type="none" w="sm" len="sm"/>
+            <a:tailEnd type="none" w="sm" len="sm"/>
+          </a:ln>
+        </p:spPr>
+      </p:pic>
     </p:spTree>
   </p:cSld>
   <p:clrMapOvr>
@@ -50845,7 +50879,7 @@
   <p:cSld>
     <p:spTree>
       <p:nvGrpSpPr>
-        <p:cNvPr id="1" name="Shape 117"/>
+        <p:cNvPr id="1" name="Shape 118"/>
         <p:cNvGrpSpPr/>
         <p:nvPr/>
       </p:nvGrpSpPr>
@@ -50859,7 +50893,7 @@
       </p:grpSpPr>
       <p:sp>
         <p:nvSpPr>
-          <p:cNvPr id="118" name="Google Shape;118;p21"/>
+          <p:cNvPr id="119" name="Google Shape;119;p21"/>
           <p:cNvSpPr txBox="1"/>
           <p:nvPr/>
         </p:nvSpPr>
@@ -51196,7 +51230,7 @@
       </p:sp>
       <p:pic>
         <p:nvPicPr>
-          <p:cNvPr id="119" name="Google Shape;119;p21"/>
+          <p:cNvPr id="120" name="Google Shape;120;p21"/>
           <p:cNvPicPr preferRelativeResize="0"/>
           <p:nvPr/>
         </p:nvPicPr>
@@ -51246,7 +51280,7 @@
   <p:cSld>
     <p:spTree>
       <p:nvGrpSpPr>
-        <p:cNvPr id="1" name="Shape 123"/>
+        <p:cNvPr id="1" name="Shape 124"/>
         <p:cNvGrpSpPr/>
         <p:nvPr/>
       </p:nvGrpSpPr>
@@ -51260,7 +51294,7 @@
       </p:grpSpPr>
       <p:sp>
         <p:nvSpPr>
-          <p:cNvPr id="124" name="Google Shape;124;p22"/>
+          <p:cNvPr id="125" name="Google Shape;125;p22"/>
           <p:cNvSpPr txBox="1"/>
           <p:nvPr/>
         </p:nvSpPr>
@@ -51326,7 +51360,7 @@
       </p:sp>
       <p:sp>
         <p:nvSpPr>
-          <p:cNvPr id="125" name="Google Shape;125;p22"/>
+          <p:cNvPr id="126" name="Google Shape;126;p22"/>
           <p:cNvSpPr txBox="1"/>
           <p:nvPr/>
         </p:nvSpPr>
@@ -51600,7 +51634,7 @@
       </p:sp>
       <p:pic>
         <p:nvPicPr>
-          <p:cNvPr id="126" name="Google Shape;126;p22"/>
+          <p:cNvPr id="127" name="Google Shape;127;p22"/>
           <p:cNvPicPr preferRelativeResize="0"/>
           <p:nvPr/>
         </p:nvPicPr>
@@ -51639,7 +51673,7 @@
       </p:pic>
       <p:sp>
         <p:nvSpPr>
-          <p:cNvPr id="127" name="Google Shape;127;p22"/>
+          <p:cNvPr id="128" name="Google Shape;128;p22"/>
           <p:cNvSpPr txBox="1"/>
           <p:nvPr/>
         </p:nvSpPr>
@@ -51924,7 +51958,7 @@
   <p:cSld>
     <p:spTree>
       <p:nvGrpSpPr>
-        <p:cNvPr id="1" name="Shape 131"/>
+        <p:cNvPr id="1" name="Shape 132"/>
         <p:cNvGrpSpPr/>
         <p:nvPr/>
       </p:nvGrpSpPr>
@@ -51938,7 +51972,7 @@
       </p:grpSpPr>
       <p:sp>
         <p:nvSpPr>
-          <p:cNvPr id="132" name="Google Shape;132;p23"/>
+          <p:cNvPr id="133" name="Google Shape;133;p23"/>
           <p:cNvSpPr txBox="1"/>
           <p:nvPr/>
         </p:nvSpPr>
@@ -52004,7 +52038,7 @@
       </p:sp>
       <p:sp>
         <p:nvSpPr>
-          <p:cNvPr id="133" name="Google Shape;133;p23"/>
+          <p:cNvPr id="134" name="Google Shape;134;p23"/>
           <p:cNvSpPr txBox="1"/>
           <p:nvPr/>
         </p:nvSpPr>
@@ -52304,7 +52338,7 @@
       </p:sp>
       <p:pic>
         <p:nvPicPr>
-          <p:cNvPr id="134" name="Google Shape;134;p23"/>
+          <p:cNvPr id="135" name="Google Shape;135;p23"/>
           <p:cNvPicPr preferRelativeResize="0"/>
           <p:nvPr/>
         </p:nvPicPr>
